--- a/exports/quarto/pptx/01_UnifiedArchitecture.pptx
+++ b/exports/quarto/pptx/01_UnifiedArchitecture.pptx
@@ -3188,7 +3188,7 @@
             </a:pPr>
             <a:r>
               <a:rPr/>
-              <a:t>March 31, 2026</a:t>
+              <a:t>April 2, 2026</a:t>
             </a:r>
           </a:p>
         </p:txBody>
@@ -3236,6 +3236,114 @@
             <a:r>
               <a:rPr/>
               <a:t>The unified architecture provides the required state.</a:t>
+            </a:r>
+          </a:p>
+          <a:p>
+            <a:pPr lvl="0" indent="0" marL="0">
+              <a:spcBef>
+                <a:spcPts val="3000"/>
+              </a:spcBef>
+              <a:buNone/>
+            </a:pPr>
+            <a:r>
+              <a:rPr b="1"/>
+              <a:t>6.5 Adapter Layer</a:t>
+            </a:r>
+          </a:p>
+          <a:p>
+            <a:pPr lvl="0" indent="0" marL="0">
+              <a:buNone/>
+            </a:pPr>
+            <a:r>
+              <a:rPr/>
+              <a:t>Adapters bridge external source systems (Entra ID, Infoblox, ServiceNow, etc.) to the UIAO control planes. Each adapter conforms to a ten-domain contract covering discovery, normalization, provenance, drift detection, health, error classification, confidence scoring, metrics, and lifecycle management.</a:t>
+            </a:r>
+          </a:p>
+          <a:p>
+            <a:pPr lvl="0" indent="0" marL="0">
+              <a:buNone/>
+            </a:pPr>
+            <a:r>
+              <a:rPr/>
+              <a:t>The adapter contract is defined in:</a:t>
+            </a:r>
+          </a:p>
+          <a:p>
+            <a:pPr lvl="0"/>
+            <a:r>
+              <a:rPr>
+                <a:latin typeface="Courier"/>
+              </a:rPr>
+              <a:t>adapters/base_adapter.py</a:t>
+            </a:r>
+            <a:r>
+              <a:rPr/>
+              <a:t> — Abstract base class (Python ABC)</a:t>
+            </a:r>
+          </a:p>
+          <a:p>
+            <a:pPr lvl="0"/>
+            <a:r>
+              <a:rPr>
+                <a:latin typeface="Courier"/>
+              </a:rPr>
+              <a:t>adapters/__init__.py</a:t>
+            </a:r>
+            <a:r>
+              <a:rPr/>
+              <a:t> — In-process adapter registry</a:t>
+            </a:r>
+          </a:p>
+          <a:p>
+            <a:pPr lvl="0"/>
+            <a:r>
+              <a:rPr>
+                <a:latin typeface="Courier"/>
+              </a:rPr>
+              <a:t>docs/adapters/adapter-contract.md</a:t>
+            </a:r>
+            <a:r>
+              <a:rPr/>
+              <a:t> — Human-readable contract specification</a:t>
+            </a:r>
+          </a:p>
+          <a:p>
+            <a:pPr lvl="0" indent="0" marL="0">
+              <a:buNone/>
+            </a:pPr>
+            <a:r>
+              <a:rPr/>
+              <a:t>Vendor-specific adapter implementations live in separate repositories (e.g., </a:t>
+            </a:r>
+            <a:r>
+              <a:rPr>
+                <a:latin typeface="Courier"/>
+              </a:rPr>
+              <a:t>uiao-adapter-entra</a:t>
+            </a:r>
+            <a:r>
+              <a:rPr/>
+              <a:t>, </a:t>
+            </a:r>
+            <a:r>
+              <a:rPr>
+                <a:latin typeface="Courier"/>
+              </a:rPr>
+              <a:t>uiao-adapter-infoblox</a:t>
+            </a:r>
+            <a:r>
+              <a:rPr/>
+              <a:t>). See </a:t>
+            </a:r>
+            <a:r>
+              <a:rPr>
+                <a:latin typeface="Courier"/>
+              </a:rPr>
+              <a:t>docs/13_FIMF_AdapterRegistry.md</a:t>
+            </a:r>
+            <a:r>
+              <a:rPr/>
+              <a:t> for the full FIMF adapter registry and onboarding checklist.</a:t>
             </a:r>
           </a:p>
         </p:txBody>
@@ -4836,6 +4944,68 @@
                   </a:txBody>
                 </a:tc>
               </a:tr>
+              <a:tr h="0">
+                <a:tc>
+                  <a:txBody>
+                    <a:bodyPr/>
+                    <a:lstStyle/>
+                    <a:p>
+                      <a:pPr lvl="0" indent="0" marL="0">
+                        <a:buNone/>
+                      </a:pPr>
+                      <a:r>
+                        <a:rPr/>
+                        <a:t>1.1</a:t>
+                      </a:r>
+                    </a:p>
+                  </a:txBody>
+                </a:tc>
+                <a:tc>
+                  <a:txBody>
+                    <a:bodyPr/>
+                    <a:lstStyle/>
+                    <a:p>
+                      <a:pPr lvl="0" indent="0" marL="0">
+                        <a:buNone/>
+                      </a:pPr>
+                      <a:r>
+                        <a:rPr/>
+                        <a:t>2026-04</a:t>
+                      </a:r>
+                    </a:p>
+                  </a:txBody>
+                </a:tc>
+                <a:tc>
+                  <a:txBody>
+                    <a:bodyPr/>
+                    <a:lstStyle/>
+                    <a:p>
+                      <a:pPr lvl="0" indent="0" marL="0">
+                        <a:buNone/>
+                      </a:pPr>
+                      <a:r>
+                        <a:rPr/>
+                        <a:t>UIAO Adapter Layer</a:t>
+                      </a:r>
+                    </a:p>
+                  </a:txBody>
+                </a:tc>
+                <a:tc>
+                  <a:txBody>
+                    <a:bodyPr/>
+                    <a:lstStyle/>
+                    <a:p>
+                      <a:pPr lvl="0" indent="0" marL="0">
+                        <a:buNone/>
+                      </a:pPr>
+                      <a:r>
+                        <a:rPr/>
+                        <a:t>Added Section 6.5 Adapter Layer cross-reference</a:t>
+                      </a:r>
+                    </a:p>
+                  </a:txBody>
+                </a:tc>
+              </a:tr>
             </a:tbl>
           </a:graphicData>
         </a:graphic>
@@ -5838,7 +6008,20 @@
             </a:pPr>
             <a:r>
               <a:rPr/>
-              <a:t>The unified architecture is governed by the Seven Core Concepts, which must appear identically across all UIAO documents:</a:t>
+              <a:t>The unified architecture is governed by the Eight Core Concepts, which must appear identically across all UIAO documents:</a:t>
+            </a:r>
+          </a:p>
+          <a:p>
+            <a:pPr lvl="0" indent="-342900" marL="342900">
+              <a:buAutoNum type="arabicPeriod"/>
+            </a:pPr>
+            <a:r>
+              <a:rPr b="1"/>
+              <a:t>Single Source of Truth (SSOT)</a:t>
+            </a:r>
+            <a:r>
+              <a:rPr/>
+              <a:t> — UIAO operates on the principle that every claim has one authoritative origin. All other representations are pointers, not copies. This ensures provenance, prevents drift, and enables federated truth resolution across boundaries.</a:t>
             </a:r>
           </a:p>
           <a:p>
